--- a/Schools_ML_Track/camp_2026/slides/ML/ML12.pptx
+++ b/Schools_ML_Track/camp_2026/slides/ML/ML12.pptx
@@ -128,7 +128,7 @@
   <p:extLst>
     <p:ext uri="{521415D9-36F7-43E2-AB2F-B90AF26B5E84}">
       <p14:sectionLst xmlns:p14="http://schemas.microsoft.com/office/powerpoint/2010/main">
-        <p14:section name="Opening" id="{bcbefe0f-de2e-7a51-b93e-abcbaba997f9}">
+        <p14:section name="Opening" id="{f2c152f7-38f0-3b9a-5180-3fd84ec37791}">
           <p14:sldIdLst>
             <p14:sldId id="256"/>
             <p14:sldId id="257"/>
@@ -138,7 +138,7 @@
             <p14:sldId id="261"/>
           </p14:sldIdLst>
         </p14:section>
-        <p14:section name="Block A" id="{03a4bcc1-8f13-6fd2-e7f6-7a48a6f1748e}">
+        <p14:section name="Block A" id="{e95232d3-c12f-ff12-ee9c-fe1d6f734c44}">
           <p14:sldIdLst>
             <p14:sldId id="262"/>
             <p14:sldId id="263"/>
@@ -149,15 +149,15 @@
             <p14:sldId id="269"/>
           </p14:sldIdLst>
         </p14:section>
-        <p14:section name="Break" id="{f9383e22-6f15-a5b4-9f4e-e46eace23936}">
+        <p14:section name="Break" id="{460dcb51-881d-2a90-a2f2-de5271c78c57}">
           <p14:sldIdLst>
             <p14:sldId id="267"/>
           </p14:sldIdLst>
         </p14:section>
-        <p14:section name="Block A" id="{a1bf1cc4-401a-406b-9534-e861f1616cc4}">
+        <p14:section name="Block A" id="{6372e2f8-2c86-36d3-7e0d-e14f353014be}">
           <p14:sldIdLst/>
         </p14:section>
-        <p14:section name="Block B" id="{cfe48564-9bf0-e417-c0b7-308743b1b1df}">
+        <p14:section name="Block B" id="{e5de252b-252a-24f0-6129-9bc4e46e9b7d}">
           <p14:sldIdLst>
             <p14:sldId id="270"/>
             <p14:sldId id="271"/>
@@ -166,7 +166,7 @@
             <p14:sldId id="274"/>
           </p14:sldIdLst>
         </p14:section>
-        <p14:section name="Make and close" id="{c1dc1a73-db64-0ce4-526f-95a8bb7fec9c}">
+        <p14:section name="Make and close" id="{c8c55a02-ef22-9bb3-51fc-bfaab1ebc5fe}">
           <p14:sldIdLst>
             <p14:sldId id="275"/>
             <p14:sldId id="276"/>

--- a/Schools_ML_Track/camp_2026/slides/ML/ML12.pptx
+++ b/Schools_ML_Track/camp_2026/slides/ML/ML12.pptx
@@ -128,7 +128,7 @@
   <p:extLst>
     <p:ext uri="{521415D9-36F7-43E2-AB2F-B90AF26B5E84}">
       <p14:sectionLst xmlns:p14="http://schemas.microsoft.com/office/powerpoint/2010/main">
-        <p14:section name="Opening" id="{f2c152f7-38f0-3b9a-5180-3fd84ec37791}">
+        <p14:section name="Opening" id="{bc269da4-842b-34a3-23b7-0909f194e635}">
           <p14:sldIdLst>
             <p14:sldId id="256"/>
             <p14:sldId id="257"/>
@@ -138,7 +138,7 @@
             <p14:sldId id="261"/>
           </p14:sldIdLst>
         </p14:section>
-        <p14:section name="Block A" id="{e95232d3-c12f-ff12-ee9c-fe1d6f734c44}">
+        <p14:section name="Block A" id="{74d2576b-2ca8-7b80-9d94-30749a4fd1b5}">
           <p14:sldIdLst>
             <p14:sldId id="262"/>
             <p14:sldId id="263"/>
@@ -149,15 +149,15 @@
             <p14:sldId id="269"/>
           </p14:sldIdLst>
         </p14:section>
-        <p14:section name="Break" id="{460dcb51-881d-2a90-a2f2-de5271c78c57}">
+        <p14:section name="Break" id="{8a798a42-02c6-659b-e240-d1615b8464a4}">
           <p14:sldIdLst>
             <p14:sldId id="267"/>
           </p14:sldIdLst>
         </p14:section>
-        <p14:section name="Block A" id="{6372e2f8-2c86-36d3-7e0d-e14f353014be}">
+        <p14:section name="Block A" id="{24690390-315a-0d1d-c59a-4dac4c3df373}">
           <p14:sldIdLst/>
         </p14:section>
-        <p14:section name="Block B" id="{e5de252b-252a-24f0-6129-9bc4e46e9b7d}">
+        <p14:section name="Block B" id="{97f27fff-fc92-b2e2-c00c-8481935782fc}">
           <p14:sldIdLst>
             <p14:sldId id="270"/>
             <p14:sldId id="271"/>
@@ -166,7 +166,7 @@
             <p14:sldId id="274"/>
           </p14:sldIdLst>
         </p14:section>
-        <p14:section name="Make and close" id="{c8c55a02-ef22-9bb3-51fc-bfaab1ebc5fe}">
+        <p14:section name="Make and close" id="{005897af-5703-46cc-f599-aadf29a0c857}">
           <p14:sldIdLst>
             <p14:sldId id="275"/>
             <p14:sldId id="276"/>
@@ -2283,7 +2283,8 @@
           <a:p>
             <a:r>
               <a:rPr lang="en-US" dirty="0"/>
-              <a:t>Read this first part of the code with me before we run anything. ['Run the skeleton, then repeat each step in your own notebook, ML12.ipynb, with your own wording.']</a:t>
+              <a:t>Let us read these lines together before anything runs.
+Your turn to guess. Predict the row count, the total revenue and the best-selling item by revenue. Put your guess on paper now, even if you are unsure.</a:t>
             </a:r>
             <a:endParaRPr lang="en-US" dirty="0"/>
           </a:p>
@@ -2371,8 +2372,7 @@
           <a:p>
             <a:r>
               <a:rPr lang="en-US" dirty="0"/>
-              <a:t>Let us read these lines together before anything runs.
-Your turn to guess. Predict the row count, the total revenue and the best-selling item by revenue. Put your guess on paper now, even if you are unsure.</a:t>
+              <a:t>Here is the rest of the code. Read it through once. Then write your guess on paper before we run anything.</a:t>
             </a:r>
             <a:endParaRPr lang="en-US" dirty="0"/>
           </a:p>
@@ -3196,7 +3196,24 @@
                 <a:ea typeface="Lato" pitchFamily="34" charset="-122"/>
                 <a:cs typeface="Lato" pitchFamily="34" charset="-120"/>
               </a:rPr>
-              <a:t>Checkpoint one and a project question</a:t>
+              <a:t>Checkpoint one and</a:t>
+            </a:r>
+            <a:endParaRPr lang="en-US" sz="5600" dirty="0"/>
+          </a:p>
+          <a:p>
+            <a:pPr algn="l" indent="0" marL="0">
+              <a:buNone/>
+            </a:pPr>
+            <a:r>
+              <a:rPr lang="en-US" sz="5600" b="1" dirty="0">
+                <a:solidFill>
+                  <a:srgbClr val="FFFFFF"/>
+                </a:solidFill>
+                <a:latin typeface="Lato" pitchFamily="34" charset="0"/>
+                <a:ea typeface="Lato" pitchFamily="34" charset="-122"/>
+                <a:cs typeface="Lato" pitchFamily="34" charset="-120"/>
+              </a:rPr>
+              <a:t>a project question</a:t>
             </a:r>
             <a:endParaRPr lang="en-US" sz="5600" dirty="0"/>
           </a:p>
@@ -5661,15 +5678,15 @@
           <a:p>
             <a:pPr algn="l" indent="0" marL="0">
               <a:lnSpc>
-                <a:spcPts val="3480"/>
+                <a:spcPts val="3120"/>
               </a:lnSpc>
               <a:spcAft>
-                <a:spcPts val="2520"/>
+                <a:spcPts val="2020"/>
               </a:spcAft>
               <a:buNone/>
             </a:pPr>
             <a:r>
-              <a:rPr lang="en-US" sz="2900" dirty="0">
+              <a:rPr lang="en-US" sz="2600" dirty="0">
                 <a:solidFill>
                   <a:srgbClr val="111111"/>
                 </a:solidFill>
@@ -5677,22 +5694,22 @@
                 <a:ea typeface="Lato" pitchFamily="34" charset="-122"/>
                 <a:cs typeface="Lato" pitchFamily="34" charset="-120"/>
               </a:rPr>
-              <a:t>In ML12.ipynb report the row count, the revenue by item, one chart, two findings and one limitation, and record your missing-value check. Run all cells from a restarted kernel and save. Add your three-sentence project question.</a:t>
-            </a:r>
-            <a:endParaRPr lang="en-US" sz="2900" dirty="0"/>
-          </a:p>
-          <a:p>
-            <a:pPr algn="l" indent="0" marL="0">
-              <a:lnSpc>
-                <a:spcPts val="3480"/>
+              <a:t>In ML12.ipynb report the row count, the revenue by item, one chart, two findings and one limitation, and record your missing-value check.</a:t>
+            </a:r>
+            <a:endParaRPr lang="en-US" sz="2600" dirty="0"/>
+          </a:p>
+          <a:p>
+            <a:pPr algn="l" indent="0" marL="0">
+              <a:lnSpc>
+                <a:spcPts val="3120"/>
               </a:lnSpc>
               <a:spcAft>
-                <a:spcPts val="2520"/>
+                <a:spcPts val="2020"/>
               </a:spcAft>
               <a:buNone/>
             </a:pPr>
             <a:r>
-              <a:rPr lang="en-US" sz="2900" dirty="0">
+              <a:rPr lang="en-US" sz="2600" dirty="0">
                 <a:solidFill>
                   <a:srgbClr val="111111"/>
                 </a:solidFill>
@@ -5700,9 +5717,55 @@
                 <a:ea typeface="Lato" pitchFamily="34" charset="-122"/>
                 <a:cs typeface="Lato" pitchFamily="34" charset="-120"/>
               </a:rPr>
-              <a:t>Save it as ML12. Write two sentences: what you changed and how you checked it.</a:t>
-            </a:r>
-            <a:endParaRPr lang="en-US" sz="2900" dirty="0"/>
+              <a:t>Run all cells from a restarted kernel and save.</a:t>
+            </a:r>
+            <a:endParaRPr lang="en-US" sz="2600" dirty="0"/>
+          </a:p>
+          <a:p>
+            <a:pPr algn="l" indent="0" marL="0">
+              <a:lnSpc>
+                <a:spcPts val="3120"/>
+              </a:lnSpc>
+              <a:spcAft>
+                <a:spcPts val="2020"/>
+              </a:spcAft>
+              <a:buNone/>
+            </a:pPr>
+            <a:r>
+              <a:rPr lang="en-US" sz="2600" dirty="0">
+                <a:solidFill>
+                  <a:srgbClr val="111111"/>
+                </a:solidFill>
+                <a:latin typeface="Lato" pitchFamily="34" charset="0"/>
+                <a:ea typeface="Lato" pitchFamily="34" charset="-122"/>
+                <a:cs typeface="Lato" pitchFamily="34" charset="-120"/>
+              </a:rPr>
+              <a:t>Add your three-sentence project question.</a:t>
+            </a:r>
+            <a:endParaRPr lang="en-US" sz="2600" dirty="0"/>
+          </a:p>
+          <a:p>
+            <a:pPr algn="l" indent="0" marL="0">
+              <a:lnSpc>
+                <a:spcPts val="3120"/>
+              </a:lnSpc>
+              <a:spcAft>
+                <a:spcPts val="2020"/>
+              </a:spcAft>
+              <a:buNone/>
+            </a:pPr>
+            <a:r>
+              <a:rPr lang="en-US" sz="2600" dirty="0">
+                <a:solidFill>
+                  <a:srgbClr val="111111"/>
+                </a:solidFill>
+                <a:latin typeface="Lato" pitchFamily="34" charset="0"/>
+                <a:ea typeface="Lato" pitchFamily="34" charset="-122"/>
+                <a:cs typeface="Lato" pitchFamily="34" charset="-120"/>
+              </a:rPr>
+              <a:t>Write two sentences: what you changed and how you checked it.</a:t>
+            </a:r>
+            <a:endParaRPr lang="en-US" sz="2600" dirty="0"/>
           </a:p>
         </p:txBody>
       </p:sp>
@@ -8666,7 +8729,7 @@
                 <a:ea typeface="Lato" pitchFamily="34" charset="-122"/>
                 <a:cs typeface="Lato" pitchFamily="34" charset="-120"/>
               </a:rPr>
-              <a:t>Read the first part of the code. 6 lines. Say what each one does.</a:t>
+              <a:t>Predict the row count, the total revenue and the best-selling item by revenue.</a:t>
             </a:r>
             <a:endParaRPr lang="en-US" sz="2400" dirty="0"/>
           </a:p>
@@ -8689,7 +8752,7 @@
                 <a:ea typeface="Lato" pitchFamily="34" charset="-122"/>
                 <a:cs typeface="Lato" pitchFamily="34" charset="-120"/>
               </a:rPr>
-              <a:t>The second part comes next.</a:t>
+              <a:t>The rest of the code is on the next slide.</a:t>
             </a:r>
             <a:endParaRPr lang="en-US" sz="2400" dirty="0"/>
           </a:p>
@@ -9155,7 +9218,7 @@
                 <a:ea typeface="Lato" pitchFamily="34" charset="-122"/>
                 <a:cs typeface="Lato" pitchFamily="34" charset="-120"/>
               </a:rPr>
-              <a:t>Predict the row count, the total revenue and the best-selling item by revenue.</a:t>
+              <a:t>This is the rest of the code. Keep your guess in mind.</a:t>
             </a:r>
             <a:endParaRPr lang="en-US" sz="2400" dirty="0"/>
           </a:p>
